--- a/sjoskolan/vecka-42/aktuell/v42_02_Regler_ansvar_och_arbetsmetoder_elev.pptx
+++ b/sjoskolan/vecka-42/aktuell/v42_02_Regler_ansvar_och_arbetsmetoder_elev.pptx
@@ -3512,6 +3512,10 @@
             <a:noFill/>
           </a:ln>
         </p:spPr>
+        <p:txBody xmlns:a="http://schemas.openxmlformats.org/drawingml/2006/main">
+          <a:bodyPr/>
+          <a:p/>
+        </p:txBody>
       </p:sp>
       <p:sp>
         <p:nvSpPr>
@@ -4348,7 +4352,7 @@
                 <a:ea typeface="Calibri"/>
                 <a:cs typeface="Calibri"/>
               </a:rPr>
-              <a:t>Redovisa din beräkning eller motivera ditt beslut.</a:t>
+              <a:t>Motivera ditt beslut.</a:t>
             </a:r>
           </a:p>
         </p:txBody>
@@ -5072,7 +5076,7 @@
                 <a:ea typeface="Calibri"/>
                 <a:cs typeface="Calibri"/>
               </a:rPr>
-              <a:t>Redovisa din beräkning eller motivera ditt beslut.</a:t>
+              <a:t>Motivera ditt beslut.</a:t>
             </a:r>
           </a:p>
         </p:txBody>
@@ -5290,7 +5294,7 @@
                 <a:ea typeface="Calibri"/>
                 <a:cs typeface="Calibri"/>
               </a:rPr>
-              <a:t>Utan spänning, med spänning, inom och utanför närområde</a:t>
+              <a:t>Metoderna skiljer sig i hur nära spänning arbetet sker</a:t>
             </a:r>
           </a:p>
         </p:txBody>
@@ -5796,7 +5800,7 @@
                 <a:ea typeface="Calibri"/>
                 <a:cs typeface="Calibri"/>
               </a:rPr>
-              <a:t>Redovisa din beräkning eller motivera ditt beslut.</a:t>
+              <a:t>Motivera ditt beslut.</a:t>
             </a:r>
           </a:p>
         </p:txBody>
@@ -6071,7 +6075,7 @@
                 <a:ea typeface="Calibri"/>
                 <a:cs typeface="Calibri"/>
               </a:rPr>
-              <a:t>Skydd mot tillkoppling, spänningslöshetskontroll och skydd mot närliggande delar ingår i planeringen.</a:t>
+              <a:t>Skydd mot återinkoppling, spänningslöshetskontroll och skydd mot närliggande delar ingår i planeringen.</a:t>
             </a:r>
           </a:p>
         </p:txBody>
@@ -6520,7 +6524,7 @@
                 <a:ea typeface="Calibri"/>
                 <a:cs typeface="Calibri"/>
               </a:rPr>
-              <a:t>Redovisa din beräkning eller motivera ditt beslut.</a:t>
+              <a:t>Motivera ditt beslut.</a:t>
             </a:r>
           </a:p>
         </p:txBody>
@@ -7244,7 +7248,7 @@
                 <a:ea typeface="Calibri"/>
                 <a:cs typeface="Calibri"/>
               </a:rPr>
-              <a:t>Redovisa din beräkning eller motivera ditt beslut.</a:t>
+              <a:t>Motivera ditt beslut.</a:t>
             </a:r>
           </a:p>
         </p:txBody>
@@ -8172,7 +8176,7 @@
         <p:spPr>
           <a:xfrm xmlns:a="http://schemas.openxmlformats.org/drawingml/2006/main">
             <a:off x="762000" y="1619250"/>
-            <a:ext cx="7620000" cy="1466850"/>
+            <a:ext cx="3977639" cy="1466850"/>
           </a:xfrm>
           <a:prstGeom xmlns:a="http://schemas.openxmlformats.org/drawingml/2006/main" prst="rect">
             <a:avLst/>
@@ -8200,7 +8204,7 @@
               </a:defRPr>
             </a:pPr>
             <a:r>
-              <a:rPr sz="2400" b="0">
+              <a:rPr sz="1800" b="0">
                 <a:solidFill>
                   <a:srgbClr val="111111"/>
                 </a:solidFill>
@@ -8224,7 +8228,7 @@
               </a:defRPr>
             </a:pPr>
             <a:r>
-              <a:rPr sz="2400" b="0">
+              <a:rPr sz="1800" b="0">
                 <a:solidFill>
                   <a:srgbClr val="111111"/>
                 </a:solidFill>
@@ -8254,7 +8258,7 @@
         <p:spPr>
           <a:xfrm xmlns:a="http://schemas.openxmlformats.org/drawingml/2006/main">
             <a:off x="762000" y="3200400"/>
-            <a:ext cx="7620000" cy="838200"/>
+            <a:ext cx="3977639" cy="838200"/>
           </a:xfrm>
           <a:prstGeom xmlns:a="http://schemas.openxmlformats.org/drawingml/2006/main" prst="rect">
             <a:avLst/>
@@ -8282,7 +8286,7 @@
               </a:defRPr>
             </a:pPr>
             <a:r>
-              <a:rPr sz="2925" b="1">
+              <a:rPr sz="2300" b="1">
                 <a:solidFill>
                   <a:srgbClr val="064F91"/>
                 </a:solidFill>
@@ -8312,7 +8316,7 @@
         <p:spPr>
           <a:xfrm xmlns:a="http://schemas.openxmlformats.org/drawingml/2006/main">
             <a:off x="762000" y="4429125"/>
-            <a:ext cx="7620000" cy="1352550"/>
+            <a:ext cx="3977639" cy="1352550"/>
           </a:xfrm>
           <a:prstGeom xmlns:a="http://schemas.openxmlformats.org/drawingml/2006/main" prst="rect">
             <a:avLst/>
@@ -8340,7 +8344,7 @@
               </a:defRPr>
             </a:pPr>
             <a:r>
-              <a:rPr sz="2250" b="0">
+              <a:rPr sz="1700" b="0">
                 <a:solidFill>
                   <a:srgbClr val="111111"/>
                 </a:solidFill>
@@ -8364,7 +8368,7 @@
               </a:defRPr>
             </a:pPr>
             <a:r>
-              <a:rPr sz="2250" b="0">
+              <a:rPr sz="1700" b="0">
                 <a:solidFill>
                   <a:srgbClr val="111111"/>
                 </a:solidFill>
@@ -8435,6 +8439,30 @@
           </a:p>
         </p:txBody>
       </p:sp>
+      <p:pic xmlns:a="http://schemas.openxmlformats.org/drawingml/2006/main" xmlns:r="http://schemas.openxmlformats.org/officeDocument/2006/relationships">
+        <p:nvPicPr>
+          <p:cNvPr id="9" name="Figur: Besked mellan driftorganisation, elsäker" descr="Besked mellan driftorganisation, elsäkerhetsledare och arbetslag: kopplingsbesked, startbesked, klart och återlämning"/>
+          <p:cNvPicPr>
+            <a:picLocks noChangeAspect="1"/>
+          </p:cNvPicPr>
+          <p:nvPr/>
+        </p:nvPicPr>
+        <p:blipFill>
+          <a:blip r:embed="rId3"/>
+          <a:stretch>
+            <a:fillRect/>
+          </a:stretch>
+        </p:blipFill>
+        <p:spPr>
+          <a:xfrm>
+            <a:off x="4892040" y="1645920"/>
+            <a:ext cx="3886200" cy="3252383"/>
+          </a:xfrm>
+          <a:prstGeom prst="rect">
+            <a:avLst/>
+          </a:prstGeom>
+        </p:spPr>
+      </p:pic>
     </p:spTree>
     <p:extLst>
       <p:ext uri="{BB962C8B-B14F-4D97-AF65-F5344CB8AC3E}">
@@ -9323,7 +9351,7 @@
         <p:spPr>
           <a:xfrm xmlns:a="http://schemas.openxmlformats.org/drawingml/2006/main">
             <a:off x="762000" y="1571625"/>
-            <a:ext cx="7620000" cy="990600"/>
+            <a:ext cx="3977639" cy="990600"/>
           </a:xfrm>
           <a:prstGeom xmlns:a="http://schemas.openxmlformats.org/drawingml/2006/main" prst="rect">
             <a:avLst/>
@@ -9350,15 +9378,15 @@
               </a:defRPr>
             </a:pPr>
             <a:r>
-              <a:rPr sz="2175" b="0">
-                <a:solidFill>
-                  <a:srgbClr val="111111"/>
-                </a:solidFill>
-                <a:latin typeface="Calibri"/>
-                <a:ea typeface="Calibri"/>
-                <a:cs typeface="Calibri"/>
-              </a:rPr>
-              <a:t>Arbete planeras på K3. Landmatningen är beskriven, men ritningen visar också ett UPS-spår.</a:t>
+              <a:rPr sz="1800" b="0">
+                <a:solidFill>
+                  <a:srgbClr val="111111"/>
+                </a:solidFill>
+                <a:latin typeface="Calibri"/>
+                <a:ea typeface="Calibri"/>
+                <a:cs typeface="Calibri"/>
+              </a:rPr>
+              <a:t>Arbete planeras på K3. Landanslutningen är beskriven, men ritningen visar också ett UPS-spår.</a:t>
             </a:r>
           </a:p>
         </p:txBody>
@@ -9380,7 +9408,7 @@
         <p:spPr>
           <a:xfrm xmlns:a="http://schemas.openxmlformats.org/drawingml/2006/main">
             <a:off x="762000" y="2705100"/>
-            <a:ext cx="7620000" cy="790575"/>
+            <a:ext cx="3977639" cy="790575"/>
           </a:xfrm>
           <a:prstGeom xmlns:a="http://schemas.openxmlformats.org/drawingml/2006/main" prst="rect">
             <a:avLst/>
@@ -9437,7 +9465,7 @@
         <p:spPr>
           <a:xfrm xmlns:a="http://schemas.openxmlformats.org/drawingml/2006/main">
             <a:off x="762000" y="3657600"/>
-            <a:ext cx="7620000" cy="1524000"/>
+            <a:ext cx="3977639" cy="1524000"/>
           </a:xfrm>
           <a:prstGeom xmlns:a="http://schemas.openxmlformats.org/drawingml/2006/main" prst="rect">
             <a:avLst/>
@@ -9464,7 +9492,7 @@
               </a:defRPr>
             </a:pPr>
             <a:r>
-              <a:rPr sz="2063" b="0">
+              <a:rPr sz="1650" b="0">
                 <a:solidFill>
                   <a:srgbClr val="111111"/>
                 </a:solidFill>
@@ -9487,7 +9515,7 @@
               </a:defRPr>
             </a:pPr>
             <a:r>
-              <a:rPr sz="2063" b="0">
+              <a:rPr sz="1650" b="0">
                 <a:solidFill>
                   <a:srgbClr val="111111"/>
                 </a:solidFill>
@@ -9510,7 +9538,7 @@
               </a:defRPr>
             </a:pPr>
             <a:r>
-              <a:rPr sz="2063" b="0">
+              <a:rPr sz="1650" b="0">
                 <a:solidFill>
                   <a:srgbClr val="111111"/>
                 </a:solidFill>
@@ -9540,7 +9568,7 @@
         <p:spPr>
           <a:xfrm xmlns:a="http://schemas.openxmlformats.org/drawingml/2006/main">
             <a:off x="762000" y="5372100"/>
-            <a:ext cx="7620000" cy="685800"/>
+            <a:ext cx="3977639" cy="685800"/>
           </a:xfrm>
           <a:prstGeom xmlns:a="http://schemas.openxmlformats.org/drawingml/2006/main" prst="rect">
             <a:avLst/>
@@ -9567,7 +9595,7 @@
               </a:defRPr>
             </a:pPr>
             <a:r>
-              <a:rPr sz="1913" b="0">
+              <a:rPr sz="1550" b="0">
                 <a:solidFill>
                   <a:srgbClr val="111111"/>
                 </a:solidFill>
@@ -9637,6 +9665,30 @@
           </a:p>
         </p:txBody>
       </p:sp>
+      <p:pic xmlns:a="http://schemas.openxmlformats.org/drawingml/2006/main" xmlns:r="http://schemas.openxmlformats.org/officeDocument/2006/relationships">
+        <p:nvPicPr>
+          <p:cNvPr id="16" name="Figur: K3 matas från landanslutning som finns i" descr="K3 matas från landanslutning som finns i planen och från UPS som finns i ritningen men inte i planen"/>
+          <p:cNvPicPr>
+            <a:picLocks noChangeAspect="1"/>
+          </p:cNvPicPr>
+          <p:nvPr/>
+        </p:nvPicPr>
+        <p:blipFill>
+          <a:blip r:embed="rId3"/>
+          <a:stretch>
+            <a:fillRect/>
+          </a:stretch>
+        </p:blipFill>
+        <p:spPr>
+          <a:xfrm>
+            <a:off x="4892040" y="1645920"/>
+            <a:ext cx="3886200" cy="3071293"/>
+          </a:xfrm>
+          <a:prstGeom prst="rect">
+            <a:avLst/>
+          </a:prstGeom>
+        </p:spPr>
+      </p:pic>
     </p:spTree>
     <p:extLst>
       <p:ext uri="{BB962C8B-B14F-4D97-AF65-F5344CB8AC3E}">
@@ -10298,7 +10350,7 @@
                 <a:ea typeface="Calibri"/>
                 <a:cs typeface="Calibri"/>
               </a:rPr>
-              <a:t>Redovisa din beräkning eller motivera ditt beslut.</a:t>
+              <a:t>Motivera ditt beslut.</a:t>
             </a:r>
           </a:p>
         </p:txBody>
@@ -11022,7 +11074,7 @@
                 <a:ea typeface="Calibri"/>
                 <a:cs typeface="Calibri"/>
               </a:rPr>
-              <a:t>Redovisa din beräkning eller motivera ditt beslut.</a:t>
+              <a:t>Motivera ditt beslut.</a:t>
             </a:r>
           </a:p>
         </p:txBody>
@@ -11240,7 +11292,7 @@
                 <a:ea typeface="Calibri"/>
                 <a:cs typeface="Calibri"/>
               </a:rPr>
-              <a:t>TSFS 2014:1 är upphävd genom TSFS 2019:4</a:t>
+              <a:t>Kontrollera föreskriftens status i regellistan</a:t>
             </a:r>
           </a:p>
         </p:txBody>
@@ -11297,7 +11349,7 @@
                 <a:ea typeface="Calibri"/>
                 <a:cs typeface="Calibri"/>
               </a:rPr>
-              <a:t>Transportstyrelsens regellista anger upphävandet. Ett nytt föreskriftsnummer kräver ändå kontroll av tillämpningen.</a:t>
+              <a:t>Transportstyrelsens regellista visar om en föreskrift gäller eller är upphävd. Ett nytt nummer kräver ändå kontroll av tillämpningen.</a:t>
             </a:r>
           </a:p>
         </p:txBody>
@@ -12260,7 +12312,7 @@
                 <a:ea typeface="Calibri"/>
                 <a:cs typeface="Calibri"/>
               </a:rPr>
-              <a:t>Redovisa din beräkning eller motivera ditt beslut.</a:t>
+              <a:t>Motivera ditt beslut.</a:t>
             </a:r>
           </a:p>
         </p:txBody>
@@ -12443,7 +12495,7 @@
         <p:spPr>
           <a:xfrm xmlns:a="http://schemas.openxmlformats.org/drawingml/2006/main">
             <a:off x="762000" y="1638300"/>
-            <a:ext cx="7620000" cy="876300"/>
+            <a:ext cx="3977639" cy="876300"/>
           </a:xfrm>
           <a:prstGeom xmlns:a="http://schemas.openxmlformats.org/drawingml/2006/main" prst="rect">
             <a:avLst/>
@@ -12470,7 +12522,7 @@
               </a:defRPr>
             </a:pPr>
             <a:r>
-              <a:rPr sz="2400" b="1">
+              <a:rPr sz="2350" b="1">
                 <a:solidFill>
                   <a:srgbClr val="064F91"/>
                 </a:solidFill>
@@ -12500,7 +12552,7 @@
         <p:spPr>
           <a:xfrm xmlns:a="http://schemas.openxmlformats.org/drawingml/2006/main">
             <a:off x="762000" y="2667000"/>
-            <a:ext cx="7620000" cy="952500"/>
+            <a:ext cx="3977639" cy="952500"/>
           </a:xfrm>
           <a:prstGeom xmlns:a="http://schemas.openxmlformats.org/drawingml/2006/main" prst="rect">
             <a:avLst/>
@@ -12527,7 +12579,7 @@
               </a:defRPr>
             </a:pPr>
             <a:r>
-              <a:rPr sz="2100" b="0">
+              <a:rPr sz="1850" b="0">
                 <a:solidFill>
                   <a:srgbClr val="111111"/>
                 </a:solidFill>
@@ -12557,7 +12609,7 @@
         <p:spPr>
           <a:xfrm xmlns:a="http://schemas.openxmlformats.org/drawingml/2006/main">
             <a:off x="762000" y="3800475"/>
-            <a:ext cx="7620000" cy="981075"/>
+            <a:ext cx="3977639" cy="981075"/>
           </a:xfrm>
           <a:prstGeom xmlns:a="http://schemas.openxmlformats.org/drawingml/2006/main" prst="rect">
             <a:avLst/>
@@ -12584,7 +12636,7 @@
               </a:defRPr>
             </a:pPr>
             <a:r>
-              <a:rPr sz="2025" b="0">
+              <a:rPr sz="1600" b="0">
                 <a:solidFill>
                   <a:srgbClr val="111111"/>
                 </a:solidFill>
@@ -12614,7 +12666,7 @@
         <p:spPr>
           <a:xfrm xmlns:a="http://schemas.openxmlformats.org/drawingml/2006/main">
             <a:off x="762000" y="5010150"/>
-            <a:ext cx="7620000" cy="990600"/>
+            <a:ext cx="3977639" cy="990600"/>
           </a:xfrm>
           <a:prstGeom xmlns:a="http://schemas.openxmlformats.org/drawingml/2006/main" prst="rect">
             <a:avLst/>
@@ -12641,7 +12693,7 @@
               </a:defRPr>
             </a:pPr>
             <a:r>
-              <a:rPr sz="2025" b="0">
+              <a:rPr sz="1600" b="0">
                 <a:solidFill>
                   <a:srgbClr val="111111"/>
                 </a:solidFill>
@@ -12711,6 +12763,30 @@
           </a:p>
         </p:txBody>
       </p:sp>
+      <p:pic xmlns:a="http://schemas.openxmlformats.org/drawingml/2006/main" xmlns:r="http://schemas.openxmlformats.org/officeDocument/2006/relationships">
+        <p:nvPicPr>
+          <p:cNvPr id="16" name="Figur: En fördelning matas från landanslutning," descr="En fördelning matas från landanslutning, som finns i planen, och från generator"/>
+          <p:cNvPicPr>
+            <a:picLocks noChangeAspect="1"/>
+          </p:cNvPicPr>
+          <p:nvPr/>
+        </p:nvPicPr>
+        <p:blipFill>
+          <a:blip r:embed="rId3"/>
+          <a:stretch>
+            <a:fillRect/>
+          </a:stretch>
+        </p:blipFill>
+        <p:spPr>
+          <a:xfrm>
+            <a:off x="4892040" y="1645920"/>
+            <a:ext cx="3886200" cy="3071293"/>
+          </a:xfrm>
+          <a:prstGeom prst="rect">
+            <a:avLst/>
+          </a:prstGeom>
+        </p:spPr>
+      </p:pic>
     </p:spTree>
     <p:extLst>
       <p:ext uri="{BB962C8B-B14F-4D97-AF65-F5344CB8AC3E}">
@@ -12984,7 +13060,7 @@
                 <a:ea typeface="Calibri"/>
                 <a:cs typeface="Calibri"/>
               </a:rPr>
-              <a:t>Redovisa din beräkning eller motivera ditt beslut.</a:t>
+              <a:t>Motivera ditt beslut.</a:t>
             </a:r>
           </a:p>
         </p:txBody>
@@ -13708,7 +13784,7 @@
                 <a:ea typeface="Calibri"/>
                 <a:cs typeface="Calibri"/>
               </a:rPr>
-              <a:t>Redovisa din beräkning eller motivera ditt beslut.</a:t>
+              <a:t>Motivera ditt beslut.</a:t>
             </a:r>
           </a:p>
         </p:txBody>
@@ -14414,64 +14490,6 @@
       </p:sp>
       <p:sp>
         <p:nvSpPr>
-          <p:cNvPr id="7" name="Källor och lärarstöd finns även i bildanteckningarna.">
-            <a:extLst xmlns:a="http://schemas.openxmlformats.org/drawingml/2006/main">
-              <a:ext uri="{FF2B5EF4-FFF2-40B4-BE49-F238E27FC236}">
-                <a16:creationId xmlns:a16="http://schemas.microsoft.com/office/drawing/2014/main" id="{BA2C4B15-CC1B-45EB-8308-C072957871DB}"/>
-              </a:ext>
-            </a:extLst>
-          </p:cNvPr>
-          <p:cNvSpPr>
-            <a:spLocks xmlns:a="http://schemas.openxmlformats.org/drawingml/2006/main" noGrp="1"/>
-          </p:cNvSpPr>
-          <p:nvPr/>
-        </p:nvSpPr>
-        <p:spPr>
-          <a:xfrm xmlns:a="http://schemas.openxmlformats.org/drawingml/2006/main">
-            <a:off x="762000" y="5676900"/>
-            <a:ext cx="7620000" cy="352425"/>
-          </a:xfrm>
-          <a:prstGeom xmlns:a="http://schemas.openxmlformats.org/drawingml/2006/main" prst="rect">
-            <a:avLst/>
-          </a:prstGeom>
-          <a:noFill xmlns:a="http://schemas.openxmlformats.org/drawingml/2006/main"/>
-          <a:ln xmlns:a="http://schemas.openxmlformats.org/drawingml/2006/main" w="0">
-            <a:noFill/>
-          </a:ln>
-        </p:spPr>
-        <p:txBody>
-          <a:bodyPr xmlns:a="http://schemas.openxmlformats.org/drawingml/2006/main" wrap="square" lIns="0" tIns="0" rIns="0" bIns="0" anchor="t">
-            <a:noAutofit/>
-          </a:bodyPr>
-          <a:lstStyle xmlns:a="http://schemas.openxmlformats.org/drawingml/2006/main"/>
-          <a:p xmlns:a="http://schemas.openxmlformats.org/drawingml/2006/main">
-            <a:pPr algn="l">
-              <a:buNone/>
-              <a:defRPr sz="1800" b="0">
-                <a:solidFill>
-                  <a:srgbClr val="111111"/>
-                </a:solidFill>
-                <a:latin typeface="Calibri"/>
-                <a:ea typeface="Calibri"/>
-                <a:cs typeface="Calibri"/>
-              </a:defRPr>
-            </a:pPr>
-            <a:r>
-              <a:rPr sz="1800" b="0">
-                <a:solidFill>
-                  <a:srgbClr val="111111"/>
-                </a:solidFill>
-                <a:latin typeface="Calibri"/>
-                <a:ea typeface="Calibri"/>
-                <a:cs typeface="Calibri"/>
-              </a:rPr>
-              <a:t>Källor och lärarstöd finns även i bildanteckningarna.</a:t>
-            </a:r>
-          </a:p>
-        </p:txBody>
-      </p:sp>
-      <p:sp>
-        <p:nvSpPr>
           <p:cNvPr id="8" name="22">
             <a:extLst xmlns:a="http://schemas.openxmlformats.org/drawingml/2006/main">
               <a:ext uri="{FF2B5EF4-FFF2-40B4-BE49-F238E27FC236}">
@@ -15946,7 +15964,7 @@
         <p:spPr>
           <a:xfrm xmlns:a="http://schemas.openxmlformats.org/drawingml/2006/main">
             <a:off x="762000" y="1619250"/>
-            <a:ext cx="7620000" cy="1466850"/>
+            <a:ext cx="3977639" cy="1466850"/>
           </a:xfrm>
           <a:prstGeom xmlns:a="http://schemas.openxmlformats.org/drawingml/2006/main" prst="rect">
             <a:avLst/>
@@ -15974,7 +15992,7 @@
               </a:defRPr>
             </a:pPr>
             <a:r>
-              <a:rPr sz="2400" b="0">
+              <a:rPr sz="2050" b="0">
                 <a:solidFill>
                   <a:srgbClr val="111111"/>
                 </a:solidFill>
@@ -15998,7 +16016,7 @@
               </a:defRPr>
             </a:pPr>
             <a:r>
-              <a:rPr sz="2400" b="0">
+              <a:rPr sz="2050" b="0">
                 <a:solidFill>
                   <a:srgbClr val="111111"/>
                 </a:solidFill>
@@ -16028,7 +16046,7 @@
         <p:spPr>
           <a:xfrm xmlns:a="http://schemas.openxmlformats.org/drawingml/2006/main">
             <a:off x="762000" y="3200400"/>
-            <a:ext cx="7620000" cy="838200"/>
+            <a:ext cx="3977639" cy="838200"/>
           </a:xfrm>
           <a:prstGeom xmlns:a="http://schemas.openxmlformats.org/drawingml/2006/main" prst="rect">
             <a:avLst/>
@@ -16056,7 +16074,7 @@
               </a:defRPr>
             </a:pPr>
             <a:r>
-              <a:rPr sz="2925" b="1">
+              <a:rPr sz="2550" b="1">
                 <a:solidFill>
                   <a:srgbClr val="064F91"/>
                 </a:solidFill>
@@ -16086,7 +16104,7 @@
         <p:spPr>
           <a:xfrm xmlns:a="http://schemas.openxmlformats.org/drawingml/2006/main">
             <a:off x="762000" y="4429125"/>
-            <a:ext cx="7620000" cy="1352550"/>
+            <a:ext cx="3977639" cy="1352550"/>
           </a:xfrm>
           <a:prstGeom xmlns:a="http://schemas.openxmlformats.org/drawingml/2006/main" prst="rect">
             <a:avLst/>
@@ -16114,15 +16132,15 @@
               </a:defRPr>
             </a:pPr>
             <a:r>
-              <a:rPr sz="2250" b="0">
-                <a:solidFill>
-                  <a:srgbClr val="111111"/>
-                </a:solidFill>
-                <a:latin typeface="Calibri"/>
-                <a:ea typeface="Calibri"/>
-                <a:cs typeface="Calibri"/>
-              </a:rPr>
-              <a:t>Fyra arbetsmetoder: utan spänning, med spänning,</a:t>
+              <a:rPr sz="1850" b="0">
+                <a:solidFill>
+                  <a:srgbClr val="111111"/>
+                </a:solidFill>
+                <a:latin typeface="Calibri"/>
+                <a:ea typeface="Calibri"/>
+                <a:cs typeface="Calibri"/>
+              </a:rPr>
+              <a:t>SS-EN 50110-1: utan spänning, med spänning och nära spänning.</a:t>
             </a:r>
           </a:p>
           <a:p xmlns:a="http://schemas.openxmlformats.org/drawingml/2006/main">
@@ -16138,15 +16156,15 @@
               </a:defRPr>
             </a:pPr>
             <a:r>
-              <a:rPr sz="2250" b="0">
-                <a:solidFill>
-                  <a:srgbClr val="111111"/>
-                </a:solidFill>
-                <a:latin typeface="Calibri"/>
-                <a:ea typeface="Calibri"/>
-                <a:cs typeface="Calibri"/>
-              </a:rPr>
-              <a:t>inom närområdet och utanför närområdet.</a:t>
+              <a:rPr sz="1850" b="0">
+                <a:solidFill>
+                  <a:srgbClr val="111111"/>
+                </a:solidFill>
+                <a:latin typeface="Calibri"/>
+                <a:ea typeface="Calibri"/>
+                <a:cs typeface="Calibri"/>
+              </a:rPr>
+              <a:t>ESA 2026: utan och med spänning, inom och utanför närområdet.</a:t>
             </a:r>
           </a:p>
         </p:txBody>
@@ -16209,6 +16227,30 @@
           </a:p>
         </p:txBody>
       </p:sp>
+      <p:pic xmlns:a="http://schemas.openxmlformats.org/drawingml/2006/main" xmlns:r="http://schemas.openxmlformats.org/officeDocument/2006/relationships">
+        <p:nvPicPr>
+          <p:cNvPr id="9" name="Figur: Områden kring en spänningssatt del: risk" descr="Områden kring en spänningssatt del: riskområde, närområde och utanför närområdet"/>
+          <p:cNvPicPr>
+            <a:picLocks noChangeAspect="1"/>
+          </p:cNvPicPr>
+          <p:nvPr/>
+        </p:nvPicPr>
+        <p:blipFill>
+          <a:blip r:embed="rId3"/>
+          <a:stretch>
+            <a:fillRect/>
+          </a:stretch>
+        </p:blipFill>
+        <p:spPr>
+          <a:xfrm>
+            <a:off x="4892040" y="1645920"/>
+            <a:ext cx="3886200" cy="4157836"/>
+          </a:xfrm>
+          <a:prstGeom prst="rect">
+            <a:avLst/>
+          </a:prstGeom>
+        </p:spPr>
+      </p:pic>
     </p:spTree>
     <p:extLst>
       <p:ext uri="{BB962C8B-B14F-4D97-AF65-F5344CB8AC3E}">
@@ -16330,7 +16372,7 @@
         <p:spPr>
           <a:xfrm xmlns:a="http://schemas.openxmlformats.org/drawingml/2006/main">
             <a:off x="762000" y="1619250"/>
-            <a:ext cx="7620000" cy="1466850"/>
+            <a:ext cx="3977639" cy="1466850"/>
           </a:xfrm>
           <a:prstGeom xmlns:a="http://schemas.openxmlformats.org/drawingml/2006/main" prst="rect">
             <a:avLst/>
@@ -16358,7 +16400,7 @@
               </a:defRPr>
             </a:pPr>
             <a:r>
-              <a:rPr sz="2400" b="0">
+              <a:rPr sz="1800" b="0">
                 <a:solidFill>
                   <a:srgbClr val="111111"/>
                 </a:solidFill>
@@ -16382,7 +16424,7 @@
               </a:defRPr>
             </a:pPr>
             <a:r>
-              <a:rPr sz="2400" b="0">
+              <a:rPr sz="1800" b="0">
                 <a:solidFill>
                   <a:srgbClr val="111111"/>
                 </a:solidFill>
@@ -16412,7 +16454,7 @@
         <p:spPr>
           <a:xfrm xmlns:a="http://schemas.openxmlformats.org/drawingml/2006/main">
             <a:off x="762000" y="3200400"/>
-            <a:ext cx="7620000" cy="838200"/>
+            <a:ext cx="3977639" cy="838200"/>
           </a:xfrm>
           <a:prstGeom xmlns:a="http://schemas.openxmlformats.org/drawingml/2006/main" prst="rect">
             <a:avLst/>
@@ -16440,7 +16482,7 @@
               </a:defRPr>
             </a:pPr>
             <a:r>
-              <a:rPr sz="2925" b="1">
+              <a:rPr sz="2650" b="1">
                 <a:solidFill>
                   <a:srgbClr val="064F91"/>
                 </a:solidFill>
@@ -16448,7 +16490,7 @@
                 <a:ea typeface="Calibri"/>
                 <a:cs typeface="Calibri"/>
               </a:rPr>
-              <a:t>Frånskiljning och skydd mot tillkoppling</a:t>
+              <a:t>Frånskiljning och skydd mot återinkoppling</a:t>
             </a:r>
           </a:p>
         </p:txBody>
@@ -16470,7 +16512,7 @@
         <p:spPr>
           <a:xfrm xmlns:a="http://schemas.openxmlformats.org/drawingml/2006/main">
             <a:off x="762000" y="4429125"/>
-            <a:ext cx="7620000" cy="1352550"/>
+            <a:ext cx="3977639" cy="1352550"/>
           </a:xfrm>
           <a:prstGeom xmlns:a="http://schemas.openxmlformats.org/drawingml/2006/main" prst="rect">
             <a:avLst/>
@@ -16498,7 +16540,7 @@
               </a:defRPr>
             </a:pPr>
             <a:r>
-              <a:rPr sz="2250" b="0">
+              <a:rPr sz="2100" b="0">
                 <a:solidFill>
                   <a:srgbClr val="111111"/>
                 </a:solidFill>
@@ -16522,7 +16564,7 @@
               </a:defRPr>
             </a:pPr>
             <a:r>
-              <a:rPr sz="2250" b="0">
+              <a:rPr sz="2100" b="0">
                 <a:solidFill>
                   <a:srgbClr val="111111"/>
                 </a:solidFill>
@@ -16593,6 +16635,30 @@
           </a:p>
         </p:txBody>
       </p:sp>
+      <p:pic xmlns:a="http://schemas.openxmlformats.org/drawingml/2006/main" xmlns:r="http://schemas.openxmlformats.org/officeDocument/2006/relationships">
+        <p:nvPicPr>
+          <p:cNvPr id="9" name="Figur: De fem säkerhetsåtgärderna i ordning: fr" descr="De fem säkerhetsåtgärderna i ordning: frånskilj, skydda mot återinkoppling, kontrollera spänningslöshet, jorda och kortslut, skydda mot närliggande spänningssatta delar"/>
+          <p:cNvPicPr>
+            <a:picLocks noChangeAspect="1"/>
+          </p:cNvPicPr>
+          <p:nvPr/>
+        </p:nvPicPr>
+        <p:blipFill>
+          <a:blip r:embed="rId3"/>
+          <a:stretch>
+            <a:fillRect/>
+          </a:stretch>
+        </p:blipFill>
+        <p:spPr>
+          <a:xfrm>
+            <a:off x="4892040" y="1645920"/>
+            <a:ext cx="3886200" cy="3976745"/>
+          </a:xfrm>
+          <a:prstGeom prst="rect">
+            <a:avLst/>
+          </a:prstGeom>
+        </p:spPr>
+      </p:pic>
     </p:spTree>
     <p:extLst>
       <p:ext uri="{BB962C8B-B14F-4D97-AF65-F5344CB8AC3E}">

--- a/sjoskolan/vecka-42/aktuell/v42_02_Regler_ansvar_och_arbetsmetoder_elev.pptx
+++ b/sjoskolan/vecka-42/aktuell/v42_02_Regler_ansvar_och_arbetsmetoder_elev.pptx
@@ -16132,15 +16132,15 @@
               </a:defRPr>
             </a:pPr>
             <a:r>
-              <a:rPr sz="1850" b="0">
-                <a:solidFill>
-                  <a:srgbClr val="111111"/>
-                </a:solidFill>
-                <a:latin typeface="Calibri"/>
-                <a:ea typeface="Calibri"/>
-                <a:cs typeface="Calibri"/>
-              </a:rPr>
-              <a:t>SS-EN 50110-1: utan spänning, med spänning och nära spänning.</a:t>
+              <a:rPr sz="1700" b="0">
+                <a:solidFill>
+                  <a:srgbClr val="111111"/>
+                </a:solidFill>
+                <a:latin typeface="Calibri"/>
+                <a:ea typeface="Calibri"/>
+                <a:cs typeface="Calibri"/>
+              </a:rPr>
+              <a:t>Båda använder fyra arbetsmetoder: utan spänning, med spänning,</a:t>
             </a:r>
           </a:p>
           <a:p xmlns:a="http://schemas.openxmlformats.org/drawingml/2006/main">
@@ -16156,15 +16156,15 @@
               </a:defRPr>
             </a:pPr>
             <a:r>
-              <a:rPr sz="1850" b="0">
-                <a:solidFill>
-                  <a:srgbClr val="111111"/>
-                </a:solidFill>
-                <a:latin typeface="Calibri"/>
-                <a:ea typeface="Calibri"/>
-                <a:cs typeface="Calibri"/>
-              </a:rPr>
-              <a:t>ESA 2026: utan och med spänning, inom och utanför närområdet.</a:t>
+              <a:rPr sz="1700" b="0">
+                <a:solidFill>
+                  <a:srgbClr val="111111"/>
+                </a:solidFill>
+                <a:latin typeface="Calibri"/>
+                <a:ea typeface="Calibri"/>
+                <a:cs typeface="Calibri"/>
+              </a:rPr>
+              <a:t>inom närområdet och utanför närområdet (SS-EN 50110-1 avsnitt 6.2–6.5).</a:t>
             </a:r>
           </a:p>
         </p:txBody>

--- a/sjoskolan/vecka-42/aktuell/v42_02_Regler_ansvar_och_arbetsmetoder_elev.pptx
+++ b/sjoskolan/vecka-42/aktuell/v42_02_Regler_ansvar_och_arbetsmetoder_elev.pptx
@@ -3903,7 +3903,7 @@
                 <a:ea typeface="Calibri"/>
                 <a:cs typeface="Calibri"/>
               </a:rPr>
-              <a:t>Föreskriften är bindande inom sitt område. Standard kan ge en teknisk metod. Lokal anvisning beskriver arbetet.</a:t>
+              <a:t>Föreskriften är bindande inom sitt område. En standard kan ge en teknisk metod, och en lokal anvisning beskriver hur arbetet görs.</a:t>
             </a:r>
           </a:p>
         </p:txBody>
@@ -4017,7 +4017,7 @@
                 <a:ea typeface="Calibri"/>
                 <a:cs typeface="Calibri"/>
               </a:rPr>
-              <a:t>Arbetsgång: Jämför dokumentens uppgift. Förklara varför tillämpningsområdet måste kontrolleras först.</a:t>
+              <a:t>Arbetsgång: Jämför vad dokumenten är till för och förklara varför du först måste kontrollera tillämpningsområdet.</a:t>
             </a:r>
           </a:p>
         </p:txBody>
@@ -4294,7 +4294,7 @@
                 <a:ea typeface="Calibri"/>
                 <a:cs typeface="Calibri"/>
               </a:rPr>
-              <a:t>Vad skiljer en myndighetsföreskrift från en teknisk standard i regelvalet?</a:t>
+              <a:t>Vad är skillnaden mellan en myndighetsföreskrift och en teknisk standard när du ska ta reda på vilka regler som gäller?</a:t>
             </a:r>
           </a:p>
         </p:txBody>
@@ -4570,7 +4570,7 @@
                 <a:ea typeface="Calibri"/>
                 <a:cs typeface="Calibri"/>
               </a:rPr>
-              <a:t>Kursunderlag: SS-EN 50110-1 utgåva 4:2024</a:t>
+              <a:t>Utgåvans grund: SS-EN 50110-1 utgåva 4:2024</a:t>
             </a:r>
           </a:p>
         </p:txBody>
@@ -4627,7 +4627,7 @@
                 <a:ea typeface="Calibri"/>
                 <a:cs typeface="Calibri"/>
               </a:rPr>
-              <a:t>Ett utgåvenummer identifierar en version. En äldre version kan ha passerat sin övergångstid.</a:t>
+              <a:t>Utgåvenumret visar vilken version det är. En äldre utgåva kan ha slutat gälla.</a:t>
             </a:r>
           </a:p>
         </p:txBody>
@@ -4684,7 +4684,7 @@
                 <a:ea typeface="Calibri"/>
                 <a:cs typeface="Calibri"/>
               </a:rPr>
-              <a:t>Förutsättningar: SEK:s uppgift i kursunderlaget: övergången från utgåva 3 löpte ut 29 maj 2026.</a:t>
+              <a:t>Förutsättningar: Enligt SEK löpte övergångstiden för utgåva 3 ut den 29 maj 2026.</a:t>
             </a:r>
           </a:p>
         </p:txBody>
@@ -4741,7 +4741,7 @@
                 <a:ea typeface="Calibri"/>
                 <a:cs typeface="Calibri"/>
               </a:rPr>
-              <a:t>Arbetsgång: Jämför pärmens version med den angivna aktuella versionen. Kontrollera även lokala anvisningar.</a:t>
+              <a:t>Arbetsgång: Jämför pärmens utgåva med den aktuella och kontrollera även de lokala anvisningarna.</a:t>
             </a:r>
           </a:p>
         </p:txBody>
@@ -5018,7 +5018,7 @@
                 <a:ea typeface="Calibri"/>
                 <a:cs typeface="Calibri"/>
               </a:rPr>
-              <a:t>En äldre pärm hänvisar till SS-EN 50110-1 utgåva 3:2013. Vilken utgåva används som grund i detta höstmaterial?</a:t>
+              <a:t>En äldre pärm hänvisar till SS-EN 50110-1 utgåva 3:2013. Vilken utgåva bygger den här boken på?</a:t>
             </a:r>
           </a:p>
         </p:txBody>
@@ -5351,7 +5351,7 @@
                 <a:ea typeface="Calibri"/>
                 <a:cs typeface="Calibri"/>
               </a:rPr>
-              <a:t>Arbetsmetoderna skiljer sig i exponering och nödvändiga säkerhetsförutsättningar.</a:t>
+              <a:t>Metoderna skiljer sig i hur nära spänningsförande delar man arbetar och vilka säkerhetskrav som gäller.</a:t>
             </a:r>
           </a:p>
         </p:txBody>
@@ -5408,7 +5408,7 @@
                 <a:ea typeface="Calibri"/>
                 <a:cs typeface="Calibri"/>
               </a:rPr>
-              <a:t>Förutsättningar: Benämningarna följer EBR ESA 2026 i denna kursöversikt. Lektionen innebär ingen ESA-certifiering.</a:t>
+              <a:t>Förutsättningar: Namnen följer EBR ESA 2026. Boken ger ingen ESA-behörighet.</a:t>
             </a:r>
           </a:p>
         </p:txBody>
@@ -5465,7 +5465,7 @@
                 <a:ea typeface="Calibri"/>
                 <a:cs typeface="Calibri"/>
               </a:rPr>
-              <a:t>Arbetsgång: Ange de fyra benämningarna. Valet av metod måste motiveras för det faktiska arbetet.</a:t>
+              <a:t>Arbetsgång: Ange de fyra namnen. Vid ett verkligt arbete måste valet av metod motiveras.</a:t>
             </a:r>
           </a:p>
         </p:txBody>
@@ -5742,7 +5742,7 @@
                 <a:ea typeface="Calibri"/>
                 <a:cs typeface="Calibri"/>
               </a:rPr>
-              <a:t>Nämn de fyra arbetsmetoder som tas upp i ESA 2026-översikten.</a:t>
+              <a:t>Nämn de fyra arbetsmetoderna i ESA 2026.</a:t>
             </a:r>
           </a:p>
         </p:txBody>
@@ -6132,7 +6132,7 @@
                 <a:ea typeface="Calibri"/>
                 <a:cs typeface="Calibri"/>
               </a:rPr>
-              <a:t>Förutsättningar: Jordning och kortslutning tillämpas enligt anläggning, arbetsmetod och gällande krav.</a:t>
+              <a:t>Förutsättningar: Jordning och kortslutning görs när anläggningen, arbetsmetoden och gällande krav kräver det.</a:t>
             </a:r>
           </a:p>
         </p:txBody>
@@ -6466,7 +6466,7 @@
                 <a:ea typeface="Calibri"/>
                 <a:cs typeface="Calibri"/>
               </a:rPr>
-              <a:t>Varför räcker enbart frånskiljning inte som hela beredningen för arbete utan spänning?</a:t>
+              <a:t>Varför räcker det inte att frånskilja när du förbereder ett arbete utan spänning?</a:t>
             </a:r>
           </a:p>
         </p:txBody>
@@ -6799,7 +6799,7 @@
                 <a:ea typeface="Calibri"/>
                 <a:cs typeface="Calibri"/>
               </a:rPr>
-              <a:t>Objekt, arbetsgräns, utförda kontroller, ansvarig och mottagare behöver vara klara.</a:t>
+              <a:t>Objekt, arbetsgräns, utförda kontroller, vem som ger beskedet och vem som tar emot det behöver vara klart.</a:t>
             </a:r>
           </a:p>
         </p:txBody>
@@ -6856,7 +6856,7 @@
                 <a:ea typeface="Calibri"/>
                 <a:cs typeface="Calibri"/>
               </a:rPr>
-              <a:t>Förutsättningar: Beskedet är: ”Den är nog avstängd, ni kan börja.” Inga verifierade kontrollresultat nämns.</a:t>
+              <a:t>Förutsättningar: Beskedet är: ”Den är nog avstängd, ni kan börja.” Inga kontroller nämns.</a:t>
             </a:r>
           </a:p>
         </p:txBody>
@@ -6913,7 +6913,7 @@
                 <a:ea typeface="Calibri"/>
                 <a:cs typeface="Calibri"/>
               </a:rPr>
-              <a:t>Arbetsgång: Identifiera två saknade uppgifter och ange varför var och en hindrar ett säkert startbeslut.</a:t>
+              <a:t>Arbetsgång: Ange två uppgifter som saknas och varför var och en gör att arbetet inte kan börja säkert.</a:t>
             </a:r>
           </a:p>
         </p:txBody>
@@ -9901,7 +9901,7 @@
                 <a:ea typeface="Calibri"/>
                 <a:cs typeface="Calibri"/>
               </a:rPr>
-              <a:t>Elsäkerhetsledaren leder säkerheten för arbetet. Driftorganisationen samordnar drift och kopplingsåtgärder.</a:t>
+              <a:t>Elsäkerhetsledaren leder säkerheten i arbetet, och driftorganisationen samordnar drift och kopplingar.</a:t>
             </a:r>
           </a:p>
         </p:txBody>
@@ -9958,7 +9958,7 @@
                 <a:ea typeface="Calibri"/>
                 <a:cs typeface="Calibri"/>
               </a:rPr>
-              <a:t>Förutsättningar: Gruppen saknar utsedd ledning för det aktuella arbetet. ”Alla håller koll” är den enda rollfördelningen.</a:t>
+              <a:t>Förutsättningar: Ingen är utsedd att leda elsäkerheten i det här arbetet. ”Alla håller koll” är den enda fördelningen av ansvar.</a:t>
             </a:r>
           </a:p>
         </p:txBody>
@@ -10015,7 +10015,7 @@
                 <a:ea typeface="Calibri"/>
                 <a:cs typeface="Calibri"/>
               </a:rPr>
-              <a:t>Arbetsgång: Förklara vilken besluts- eller samordningsuppgift som annars riskerar att falla mellan personer.</a:t>
+              <a:t>Arbetsgång: Förklara vilket beslut eller vilken samordning som annars riskerar att ingen tar hand om.</a:t>
             </a:r>
           </a:p>
         </p:txBody>
@@ -10292,7 +10292,7 @@
                 <a:ea typeface="Calibri"/>
                 <a:cs typeface="Calibri"/>
               </a:rPr>
-              <a:t>En grupp saknar utsedd ledning för elsäkerheten i arbetsmomentet. Kan ett allmänt muntligt ”alla håller koll” ersätta detta?</a:t>
+              <a:t>Ingen i en arbetsgrupp är utsedd att leda elsäkerheten. Kan ett muntligt ”alla håller koll” ersätta det?</a:t>
             </a:r>
           </a:p>
         </p:txBody>
@@ -10625,7 +10625,7 @@
                 <a:ea typeface="Calibri"/>
                 <a:cs typeface="Calibri"/>
               </a:rPr>
-              <a:t>Fartygstyp, storlek, trafik, byggnadsdata och berört system påverkar vilka föreskrifter som gäller.</a:t>
+              <a:t>Fartygstyp, storlek, trafik, byggnadsdata och vilket system det gäller påverkar vilka föreskrifter som gäller.</a:t>
             </a:r>
           </a:p>
         </p:txBody>
@@ -10682,7 +10682,7 @@
                 <a:ea typeface="Calibri"/>
                 <a:cs typeface="Calibri"/>
               </a:rPr>
-              <a:t>Förutsättningar: Inga sådana fartygsdata är givna. Därför ska uppgiften besvaras med informationsbehov, inte gissad paragraf.</a:t>
+              <a:t>Förutsättningar: Inga fartygsdata är givna. Svara därför med vilken information som behövs – gissa inte en paragraf.</a:t>
             </a:r>
           </a:p>
         </p:txBody>
@@ -10739,7 +10739,7 @@
                 <a:ea typeface="Calibri"/>
                 <a:cs typeface="Calibri"/>
               </a:rPr>
-              <a:t>Arbetsgång: Lista nödvändiga uppgifter och förklara hur de används för att kontrollera tillämpningsområdet.</a:t>
+              <a:t>Arbetsgång: Lista uppgifterna och förklara hur du använder dem för att kontrollera tillämpningsområdet.</a:t>
             </a:r>
           </a:p>
         </p:txBody>
@@ -11016,7 +11016,7 @@
                 <a:ea typeface="Calibri"/>
                 <a:cs typeface="Calibri"/>
               </a:rPr>
-              <a:t>Du får ett fall om en elektrisk installation på ett fartyg. Vilka uppgifter behövs innan du väljer TSFS-hänvisning?</a:t>
+              <a:t>Du får ett fall om en elektrisk installation på ett fartyg. Vilka uppgifter behöver du innan du kan hänvisa till rätt TSFS?</a:t>
             </a:r>
           </a:p>
         </p:txBody>
@@ -11406,7 +11406,7 @@
                 <a:ea typeface="Calibri"/>
                 <a:cs typeface="Calibri"/>
               </a:rPr>
-              <a:t>Förutsättningar: Underlagssidan kallar TSFS 2014:1 aktuell. Kursfallet ger inget stöd för att använda den så.</a:t>
+              <a:t>Förutsättningar: Dokumentet säger att TSFS 2014:1 gäller. Inget i fallet stöder det.</a:t>
             </a:r>
           </a:p>
         </p:txBody>
@@ -12254,7 +12254,7 @@
                 <a:ea typeface="Calibri"/>
                 <a:cs typeface="Calibri"/>
               </a:rPr>
-              <a:t>En underlagssida anger TSFS 2014:1 som aktuell. Vad visar Transportstyrelsens regellista?</a:t>
+              <a:t>Ett dokument anger att TSFS 2014:1 gäller. Vad säger Transportstyrelsens regellista?</a:t>
             </a:r>
           </a:p>
         </p:txBody>
@@ -12587,7 +12587,7 @@
                 <a:ea typeface="Calibri"/>
                 <a:cs typeface="Calibri"/>
               </a:rPr>
-              <a:t>Normalmatning, reservmatning och möjlig återspänningssättning påverkar samma arbetsområde.</a:t>
+              <a:t>Normal matning, reservmatning och risken att spänningen kommer tillbaka påverkar samma arbetsområde.</a:t>
             </a:r>
           </a:p>
         </p:txBody>
@@ -12701,7 +12701,7 @@
                 <a:ea typeface="Calibri"/>
                 <a:cs typeface="Calibri"/>
               </a:rPr>
-              <a:t>Arbetsgång: Jämför planens energikällor med fallets. Ange vilken komplettering som behövs före fortsatt beslut.</a:t>
+              <a:t>Arbetsgång: Jämför energikällorna i planen med dem i fallet och ange vad som måste läggas till innan arbetet kan börja.</a:t>
             </a:r>
           </a:p>
         </p:txBody>
@@ -13335,7 +13335,7 @@
                 <a:ea typeface="Calibri"/>
                 <a:cs typeface="Calibri"/>
               </a:rPr>
-              <a:t>En hänvisning ska visa kontrollerat avsnitt och varför det gäller just detta arbetsfall.</a:t>
+              <a:t>En hänvisning ska visa vilket avsnitt som är kontrollerat och varför det gäller just det här arbetet.</a:t>
             </a:r>
           </a:p>
         </p:txBody>
@@ -13392,7 +13392,7 @@
                 <a:ea typeface="Calibri"/>
                 <a:cs typeface="Calibri"/>
               </a:rPr>
-              <a:t>Förutsättningar: Uppgiften kräver ett exempel på struktur. Saknade fartygsdata eller okända avsnitt ska redovisas som öppna frågor.</a:t>
+              <a:t>Förutsättningar: Det räcker att visa hur hänvisningen ska byggas upp. Fartygsdata eller avsnitt som saknas skrivs som öppna frågor.</a:t>
             </a:r>
           </a:p>
         </p:txBody>
@@ -13449,7 +13449,7 @@
                 <a:ea typeface="Calibri"/>
                 <a:cs typeface="Calibri"/>
               </a:rPr>
-              <a:t>Arbetsgång: Skriv en hänvisningsmall med dokument och motivering. Lämna ingen påhittad paragraf som ett faktum.</a:t>
+              <a:t>Arbetsgång: Skriv en mall med dokument och motivering. Skriv aldrig en påhittad paragraf som om den vore fakta.</a:t>
             </a:r>
           </a:p>
         </p:txBody>
@@ -13726,7 +13726,7 @@
                 <a:ea typeface="Calibri"/>
                 <a:cs typeface="Calibri"/>
               </a:rPr>
-              <a:t>Skriv ett exempel på hur en regelhänvisning kan göras spårbar utan att gissa en paragraf.</a:t>
+              <a:t>Skriv ett exempel på en hänvisning till en regel som går att kontrollera i efterhand, utan att du gissar en paragraf.</a:t>
             </a:r>
           </a:p>
         </p:txBody>

--- a/sjoskolan/vecka-42/aktuell/v42_02_Regler_ansvar_och_arbetsmetoder_elev.pptx
+++ b/sjoskolan/vecka-42/aktuell/v42_02_Regler_ansvar_och_arbetsmetoder_elev.pptx
@@ -3789,7 +3789,7 @@
                 <a:ea typeface="Calibri"/>
                 <a:cs typeface="Calibri"/>
               </a:rPr>
-              <a:t>Stöd till övning 1</a:t>
+              <a:t>Stöd till övning 2.1</a:t>
             </a:r>
           </a:p>
         </p:txBody>
@@ -4178,7 +4178,7 @@
                 <a:ea typeface="Calibri"/>
                 <a:cs typeface="Calibri"/>
               </a:rPr>
-              <a:t>Övning 1</a:t>
+              <a:t>Övning 2.1</a:t>
             </a:r>
           </a:p>
         </p:txBody>
@@ -4513,7 +4513,7 @@
                 <a:ea typeface="Calibri"/>
                 <a:cs typeface="Calibri"/>
               </a:rPr>
-              <a:t>Stöd till övning 2</a:t>
+              <a:t>Stöd till övning 2.2</a:t>
             </a:r>
           </a:p>
         </p:txBody>
@@ -4902,7 +4902,7 @@
                 <a:ea typeface="Calibri"/>
                 <a:cs typeface="Calibri"/>
               </a:rPr>
-              <a:t>Övning 2</a:t>
+              <a:t>Övning 2.2</a:t>
             </a:r>
           </a:p>
         </p:txBody>
@@ -5237,7 +5237,7 @@
                 <a:ea typeface="Calibri"/>
                 <a:cs typeface="Calibri"/>
               </a:rPr>
-              <a:t>Stöd till övning 3</a:t>
+              <a:t>Stöd till övning 2.3</a:t>
             </a:r>
           </a:p>
         </p:txBody>
@@ -5626,7 +5626,7 @@
                 <a:ea typeface="Calibri"/>
                 <a:cs typeface="Calibri"/>
               </a:rPr>
-              <a:t>Övning 3</a:t>
+              <a:t>Övning 2.3</a:t>
             </a:r>
           </a:p>
         </p:txBody>
@@ -5961,7 +5961,7 @@
                 <a:ea typeface="Calibri"/>
                 <a:cs typeface="Calibri"/>
               </a:rPr>
-              <a:t>Stöd till övning 4</a:t>
+              <a:t>Stöd till övning 2.4</a:t>
             </a:r>
           </a:p>
         </p:txBody>
@@ -6350,7 +6350,7 @@
                 <a:ea typeface="Calibri"/>
                 <a:cs typeface="Calibri"/>
               </a:rPr>
-              <a:t>Övning 4</a:t>
+              <a:t>Övning 2.4</a:t>
             </a:r>
           </a:p>
         </p:txBody>
@@ -6685,7 +6685,7 @@
                 <a:ea typeface="Calibri"/>
                 <a:cs typeface="Calibri"/>
               </a:rPr>
-              <a:t>Stöd till övning 5</a:t>
+              <a:t>Stöd till övning 2.5</a:t>
             </a:r>
           </a:p>
         </p:txBody>
@@ -7074,7 +7074,7 @@
                 <a:ea typeface="Calibri"/>
                 <a:cs typeface="Calibri"/>
               </a:rPr>
-              <a:t>Övning 5</a:t>
+              <a:t>Övning 2.5</a:t>
             </a:r>
           </a:p>
         </p:txBody>
@@ -9787,7 +9787,7 @@
                 <a:ea typeface="Calibri"/>
                 <a:cs typeface="Calibri"/>
               </a:rPr>
-              <a:t>Stöd till övning 6</a:t>
+              <a:t>Stöd till övning 2.6</a:t>
             </a:r>
           </a:p>
         </p:txBody>
@@ -10176,7 +10176,7 @@
                 <a:ea typeface="Calibri"/>
                 <a:cs typeface="Calibri"/>
               </a:rPr>
-              <a:t>Övning 6</a:t>
+              <a:t>Övning 2.6</a:t>
             </a:r>
           </a:p>
         </p:txBody>
@@ -10511,7 +10511,7 @@
                 <a:ea typeface="Calibri"/>
                 <a:cs typeface="Calibri"/>
               </a:rPr>
-              <a:t>Stöd till övning 7</a:t>
+              <a:t>Stöd till övning 2.7</a:t>
             </a:r>
           </a:p>
         </p:txBody>
@@ -10900,7 +10900,7 @@
                 <a:ea typeface="Calibri"/>
                 <a:cs typeface="Calibri"/>
               </a:rPr>
-              <a:t>Övning 7</a:t>
+              <a:t>Övning 2.7</a:t>
             </a:r>
           </a:p>
         </p:txBody>
@@ -11235,7 +11235,7 @@
                 <a:ea typeface="Calibri"/>
                 <a:cs typeface="Calibri"/>
               </a:rPr>
-              <a:t>Stöd till övning 8</a:t>
+              <a:t>Stöd till övning 2.8</a:t>
             </a:r>
           </a:p>
         </p:txBody>
@@ -12138,7 +12138,7 @@
                 <a:ea typeface="Calibri"/>
                 <a:cs typeface="Calibri"/>
               </a:rPr>
-              <a:t>Övning 8</a:t>
+              <a:t>Övning 2.8</a:t>
             </a:r>
           </a:p>
         </p:txBody>
@@ -12473,7 +12473,7 @@
                 <a:ea typeface="Calibri"/>
                 <a:cs typeface="Calibri"/>
               </a:rPr>
-              <a:t>Stöd till övning 9</a:t>
+              <a:t>Stöd till övning 2.9</a:t>
             </a:r>
           </a:p>
         </p:txBody>
@@ -12886,7 +12886,7 @@
                 <a:ea typeface="Calibri"/>
                 <a:cs typeface="Calibri"/>
               </a:rPr>
-              <a:t>Övning 9</a:t>
+              <a:t>Övning 2.9</a:t>
             </a:r>
           </a:p>
         </p:txBody>
@@ -13221,7 +13221,7 @@
                 <a:ea typeface="Calibri"/>
                 <a:cs typeface="Calibri"/>
               </a:rPr>
-              <a:t>Stöd till övning 10</a:t>
+              <a:t>Stöd till övning 2.10</a:t>
             </a:r>
           </a:p>
         </p:txBody>
@@ -13610,7 +13610,7 @@
                 <a:ea typeface="Calibri"/>
                 <a:cs typeface="Calibri"/>
               </a:rPr>
-              <a:t>Övning 10</a:t>
+              <a:t>Övning 2.10</a:t>
             </a:r>
           </a:p>
         </p:txBody>

--- a/sjoskolan/vecka-42/aktuell/v42_02_Regler_ansvar_och_arbetsmetoder_elev.pptx
+++ b/sjoskolan/vecka-42/aktuell/v42_02_Regler_ansvar_och_arbetsmetoder_elev.pptx
@@ -7968,7 +7968,7 @@
                 <a:ea typeface="Calibri"/>
                 <a:cs typeface="Calibri"/>
               </a:rPr>
-              <a:t>Teori och exempel följs av övning 6–10.</a:t>
+              <a:t>Teori och exempel följs av övning 2.6–2.10.</a:t>
             </a:r>
           </a:p>
           <a:p xmlns:a="http://schemas.openxmlformats.org/drawingml/2006/main">
@@ -11760,7 +11760,7 @@
                 <a:ea typeface="Calibri"/>
                 <a:cs typeface="Calibri"/>
               </a:rPr>
-              <a:t>15 min övning 1, 2, 4, 5 min återkoppling</a:t>
+              <a:t>15 min övning 2.1, 2.2 och 2.4, 5 min återkoppling</a:t>
             </a:r>
           </a:p>
         </p:txBody>
@@ -11874,7 +11874,7 @@
                 <a:ea typeface="Calibri"/>
                 <a:cs typeface="Calibri"/>
               </a:rPr>
-              <a:t>20 min teori och exempel, 15 min övning 6, 7, 8</a:t>
+              <a:t>20 min teori och exempel, 15 min övning 2.6, 2.7 och 2.8</a:t>
             </a:r>
           </a:p>
           <a:p xmlns:a="http://schemas.openxmlformats.org/drawingml/2006/main">

--- a/sjoskolan/vecka-42/aktuell/v42_02_Regler_ansvar_och_arbetsmetoder_elev.pptx
+++ b/sjoskolan/vecka-42/aktuell/v42_02_Regler_ansvar_och_arbetsmetoder_elev.pptx
@@ -16140,7 +16140,7 @@
                 <a:ea typeface="Calibri"/>
                 <a:cs typeface="Calibri"/>
               </a:rPr>
-              <a:t>Båda använder fyra arbetsmetoder: utan spänning, med spänning,</a:t>
+              <a:t>SS-EN 50110-1 har tre arbetsmetoder: utan spänning, med spänning och nära spänning (avsnitt 6.2–6.4).</a:t>
             </a:r>
           </a:p>
           <a:p xmlns:a="http://schemas.openxmlformats.org/drawingml/2006/main">
@@ -16164,7 +16164,7 @@
                 <a:ea typeface="Calibri"/>
                 <a:cs typeface="Calibri"/>
               </a:rPr>
-              <a:t>inom närområdet och utanför närområdet (SS-EN 50110-1 avsnitt 6.2–6.5).</a:t>
+              <a:t>ESA delar in i fyra: utan och med spänning, inom och utanför närområdet.</a:t>
             </a:r>
           </a:p>
         </p:txBody>

--- a/sjoskolan/vecka-42/aktuell/v42_02_Regler_ansvar_och_arbetsmetoder_elev.pptx
+++ b/sjoskolan/vecka-42/aktuell/v42_02_Regler_ansvar_och_arbetsmetoder_elev.pptx
@@ -16140,7 +16140,7 @@
                 <a:ea typeface="Calibri"/>
                 <a:cs typeface="Calibri"/>
               </a:rPr>
-              <a:t>SS-EN 50110-1 har tre arbetsmetoder: utan spänning, med spänning och nära spänning (avsnitt 6.2–6.4).</a:t>
+              <a:t>SS-EN 50110-1: tre metoder (utan spänning, med spänning, nära spänning).</a:t>
             </a:r>
           </a:p>
           <a:p xmlns:a="http://schemas.openxmlformats.org/drawingml/2006/main">
@@ -16164,7 +16164,7 @@
                 <a:ea typeface="Calibri"/>
                 <a:cs typeface="Calibri"/>
               </a:rPr>
-              <a:t>ESA delar in i fyra: utan och med spänning, inom och utanför närområdet.</a:t>
+              <a:t>ESA: fyra metoder (kompletterar med arbete utanför närområde).</a:t>
             </a:r>
           </a:p>
         </p:txBody>

--- a/sjoskolan/vecka-42/aktuell/v42_02_Regler_ansvar_och_arbetsmetoder_elev.pptx
+++ b/sjoskolan/vecka-42/aktuell/v42_02_Regler_ansvar_och_arbetsmetoder_elev.pptx
@@ -16229,14 +16229,14 @@
       </p:sp>
       <p:pic xmlns:a="http://schemas.openxmlformats.org/drawingml/2006/main" xmlns:r="http://schemas.openxmlformats.org/officeDocument/2006/relationships">
         <p:nvPicPr>
-          <p:cNvPr id="9" name="Figur: Områden kring en spänningssatt del: risk" descr="Områden kring en spänningssatt del: riskområde, närområde och utanför närområdet"/>
+          <p:cNvPr id="9" name="Figur: Riskområde och närområde som skal runt e" descr="Riskområde och närområde som skal runt en spänningssatt del, åt alla håll. En person står utanför närområdet. Med spänning: arbete i riskområdet; nära spänning: i närområdet; utan spänning: efter de fem säkerhetsåtgärderna"/>
           <p:cNvPicPr>
             <a:picLocks noChangeAspect="1"/>
           </p:cNvPicPr>
           <p:nvPr/>
         </p:nvPicPr>
         <p:blipFill>
-          <a:blip r:embed="rId3"/>
+          <a:blip r:embed="rId5"/>
           <a:stretch>
             <a:fillRect/>
           </a:stretch>
@@ -16244,7 +16244,7 @@
         <p:spPr>
           <a:xfrm>
             <a:off x="4892040" y="1645920"/>
-            <a:ext cx="3886200" cy="4157836"/>
+            <a:ext cx="3886200" cy="2028891"/>
           </a:xfrm>
           <a:prstGeom prst="rect">
             <a:avLst/>

--- a/sjoskolan/vecka-42/aktuell/v42_02_Regler_ansvar_och_arbetsmetoder_elev.pptx
+++ b/sjoskolan/vecka-42/aktuell/v42_02_Regler_ansvar_och_arbetsmetoder_elev.pptx
@@ -4294,7 +4294,7 @@
                 <a:ea typeface="Calibri"/>
                 <a:cs typeface="Calibri"/>
               </a:rPr>
-              <a:t>Vad är skillnaden mellan en myndighetsföreskrift och en teknisk standard när du ska ta reda på vilka regler som gäller?</a:t>
+              <a:t>Vad är skillnaden mellan en föreskrift från en myndighet och en teknisk standard?</a:t>
             </a:r>
           </a:p>
         </p:txBody>
@@ -4570,7 +4570,7 @@
                 <a:ea typeface="Calibri"/>
                 <a:cs typeface="Calibri"/>
               </a:rPr>
-              <a:t>Utgåvans grund: SS-EN 50110-1 utgåva 4:2024</a:t>
+              <a:t>Kontrollera utgåva och övergångstid</a:t>
             </a:r>
           </a:p>
         </p:txBody>
@@ -4684,7 +4684,7 @@
                 <a:ea typeface="Calibri"/>
                 <a:cs typeface="Calibri"/>
               </a:rPr>
-              <a:t>Förutsättningar: Enligt SEK löpte övergångstiden för utgåva 3 ut den 29 maj 2026.</a:t>
+              <a:t>Förutsättningar: Kursen bygger på SS-EN 50110-1 utgåva 4:2024. Enligt SEK löpte övergångstiden för utgåva 3 ut den 29 maj 2026.</a:t>
             </a:r>
           </a:p>
         </p:txBody>
@@ -5018,7 +5018,7 @@
                 <a:ea typeface="Calibri"/>
                 <a:cs typeface="Calibri"/>
               </a:rPr>
-              <a:t>En äldre pärm hänvisar till SS-EN 50110-1 utgåva 3:2013. Vilken utgåva bygger den här boken på?</a:t>
+              <a:t>En äldre pärm hänvisar till SS-EN 50110-1 utgåva 3:2013. Kan du följa pärmen? Vad gör du?</a:t>
             </a:r>
           </a:p>
         </p:txBody>
@@ -6132,7 +6132,7 @@
                 <a:ea typeface="Calibri"/>
                 <a:cs typeface="Calibri"/>
               </a:rPr>
-              <a:t>Förutsättningar: Jordning och kortslutning görs när anläggningen, arbetsmetoden och gällande krav kräver det.</a:t>
+              <a:t>Förutsättningar: Ibland ska anläggningen också jordas och kortslutas. Det beror på anläggningen och arbetet.</a:t>
             </a:r>
           </a:p>
         </p:txBody>
@@ -10625,7 +10625,7 @@
                 <a:ea typeface="Calibri"/>
                 <a:cs typeface="Calibri"/>
               </a:rPr>
-              <a:t>Fartygstyp, storlek, trafik, byggnadsdata och vilket system det gäller påverkar vilka föreskrifter som gäller.</a:t>
+              <a:t>En föreskrift gäller bara för vissa fartyg och viss utrustning. Det står i föreskriftens tillämpningsområde.</a:t>
             </a:r>
           </a:p>
         </p:txBody>
@@ -11016,7 +11016,7 @@
                 <a:ea typeface="Calibri"/>
                 <a:cs typeface="Calibri"/>
               </a:rPr>
-              <a:t>Du får ett fall om en elektrisk installation på ett fartyg. Vilka uppgifter behöver du innan du kan hänvisa till rätt TSFS?</a:t>
+              <a:t>Du ska ta reda på vilka regler för el som gäller på ett fartyg. Vilka uppgifter om fartyget behöver du först?</a:t>
             </a:r>
           </a:p>
         </p:txBody>
@@ -11463,7 +11463,7 @@
                 <a:ea typeface="Calibri"/>
                 <a:cs typeface="Calibri"/>
               </a:rPr>
-              <a:t>Arbetsgång: Ange vilken hänvisning som är inaktuell och vad som behöver verifieras i ersättningsregelverket.</a:t>
+              <a:t>Arbetsgång: Skriv om föreskriften gäller eller inte. Om den har ersatts: vad måste du kolla i den nya?</a:t>
             </a:r>
           </a:p>
         </p:txBody>
@@ -12254,7 +12254,7 @@
                 <a:ea typeface="Calibri"/>
                 <a:cs typeface="Calibri"/>
               </a:rPr>
-              <a:t>Ett dokument anger att TSFS 2014:1 gäller. Vad säger Transportstyrelsens regellista?</a:t>
+              <a:t>Ett dokument säger att TSFS 2014:1 gäller. Slå upp numret i Transportstyrelsens regellista. Gäller det fortfarande?</a:t>
             </a:r>
           </a:p>
         </p:txBody>
@@ -12587,7 +12587,7 @@
                 <a:ea typeface="Calibri"/>
                 <a:cs typeface="Calibri"/>
               </a:rPr>
-              <a:t>Normal matning, reservmatning och risken att spänningen kommer tillbaka påverkar samma arbetsområde.</a:t>
+              <a:t>Fördelningen kan få el från mer än ett håll. Planen måste ta med varje väg som kan ge el.</a:t>
             </a:r>
           </a:p>
         </p:txBody>
@@ -13726,7 +13726,7 @@
                 <a:ea typeface="Calibri"/>
                 <a:cs typeface="Calibri"/>
               </a:rPr>
-              <a:t>Skriv ett exempel på en hänvisning till en regel som går att kontrollera i efterhand, utan att du gissar en paragraf.</a:t>
+              <a:t>Skriv en hänvisning till en regel. Ta med dokumentets namn, utgåva, avsnitt och varför den gäller. Hitta inte på ett paragrafnummer.</a:t>
             </a:r>
           </a:p>
         </p:txBody>
@@ -16814,7 +16814,7 @@
                 <a:ea typeface="Calibri"/>
                 <a:cs typeface="Calibri"/>
               </a:rPr>
-              <a:t>Ett fartyg behöver ändrad elektrisk utrustning. Underlaget anger varken fartygstyp eller byggnadsår.</a:t>
+              <a:t>Ett fartyg ska få en ny landanslutning. Underlaget säger bara ”enligt gällande regler”.</a:t>
             </a:r>
           </a:p>
         </p:txBody>
@@ -16928,7 +16928,7 @@
                 <a:ea typeface="Calibri"/>
                 <a:cs typeface="Calibri"/>
               </a:rPr>
-              <a:t>1. Begär fartygstyp, storlek, trafik och byggnads-/ombyggnadsdata.</a:t>
+              <a:t>1. Skriv upp vilka uppgifter om fartyget som saknas i underlaget. Gissa dem inte.</a:t>
             </a:r>
           </a:p>
           <a:p xmlns:a="http://schemas.openxmlformats.org/drawingml/2006/main">
@@ -16974,7 +16974,7 @@
                 <a:ea typeface="Calibri"/>
                 <a:cs typeface="Calibri"/>
               </a:rPr>
-              <a:t>3. Dokumentera aktuell version och relevant, kontrollerat avsnitt.</a:t>
+              <a:t>3. Dokumentera aktuell version och det avsnitt du har kontrollerat.</a:t>
             </a:r>
           </a:p>
         </p:txBody>

--- a/sjoskolan/vecka-42/aktuell/v42_02_Regler_ansvar_och_arbetsmetoder_elev.pptx
+++ b/sjoskolan/vecka-42/aktuell/v42_02_Regler_ansvar_och_arbetsmetoder_elev.pptx
@@ -3652,9 +3652,64 @@
           </a:p>
         </p:txBody>
       </p:sp>
+      <p:sp>
+        <p:nvSpPr>
+          <p:cNvPr id="8" name="Dag: Tisdag 13 oktober"/>
+          <p:cNvSpPr/>
+          <p:nvPr/>
+        </p:nvSpPr>
+        <p:spPr>
+          <a:xfrm>
+            <a:off x="548640" y="411480"/>
+            <a:ext cx="2944368" cy="438912"/>
+          </a:xfrm>
+          <a:prstGeom prst="roundRect">
+            <a:avLst>
+              <a:gd name="adj" fmla="val 18000"/>
+            </a:avLst>
+          </a:prstGeom>
+          <a:solidFill>
+            <a:srgbClr val="2468C0"/>
+          </a:solidFill>
+          <a:ln>
+            <a:noFill/>
+          </a:ln>
+          <a:effectLst/>
+        </p:spPr>
+        <p:style>
+          <a:lnRef idx="1">
+            <a:schemeClr val="accent1"/>
+          </a:lnRef>
+          <a:fillRef idx="3">
+            <a:schemeClr val="accent1"/>
+          </a:fillRef>
+          <a:effectRef idx="2">
+            <a:schemeClr val="accent1"/>
+          </a:effectRef>
+          <a:fontRef idx="minor">
+            <a:schemeClr val="lt1"/>
+          </a:fontRef>
+        </p:style>
+        <p:txBody>
+          <a:bodyPr rtlCol="0" anchor="ctr" lIns="109728" rIns="109728"/>
+          <a:lstStyle/>
+          <a:p>
+            <a:pPr algn="ctr"/>
+            <a:r>
+              <a:rPr sz="1800" b="1" i="0">
+                <a:solidFill>
+                  <a:srgbClr val="FFFFFF"/>
+                </a:solidFill>
+                <a:latin typeface="Calibri"/>
+              </a:rPr>
+              <a:t>Tisdag 13 oktober</a:t>
+            </a:r>
+          </a:p>
+        </p:txBody>
+      </p:sp>
       <p:pic>
         <p:nvPicPr>
-          <p:cNvPr id="8" name="Picture 7" descr="sidfot.jpg"/>
+          <p:cNvPr id="9" name="Picture 8" descr="sidfot.jpg"/>
           <p:cNvPicPr>
             <a:picLocks noChangeAspect="1"/>
           </p:cNvPicPr>
@@ -3678,7 +3733,7 @@
       </p:pic>
       <p:sp>
         <p:nvSpPr>
-          <p:cNvPr id="9" name="TextBox 8"/>
+          <p:cNvPr id="10" name="TextBox 9"/>
           <p:cNvSpPr txBox="1"/>
           <p:nvPr/>
         </p:nvSpPr>
@@ -3720,7 +3775,7 @@
       </p:sp>
       <p:sp>
         <p:nvSpPr>
-          <p:cNvPr id="10" name="TextBox 9"/>
+          <p:cNvPr id="11" name="TextBox 10"/>
           <p:cNvSpPr txBox="1"/>
           <p:nvPr/>
         </p:nvSpPr>
@@ -7055,7 +7110,7 @@
                 </a:solidFill>
                 <a:latin typeface="Calibri"/>
               </a:rPr>
-              <a:t>1. Läs del 2 på webben. Tryck på ”Jag har läst del 2” längst ned på sidan.</a:t>
+              <a:t>1. Läs del 2. Tryck på ”Jag har läst del 2” längst ned på sidan.</a:t>
             </a:r>
           </a:p>
           <a:p>
@@ -7093,7 +7148,7 @@
                 </a:solidFill>
                 <a:latin typeface="Calibri"/>
               </a:rPr>
-              <a:t>3. Börja på inlämningen: uppgift 1 och 2. Läs Transportstyrelsens riktlinjer för riskanalysarbete till fredag (uppgift 4).</a:t>
+              <a:t>3. Börja på inlämningen: uppgift 1 och 2.</a:t>
             </a:r>
           </a:p>
           <a:p>
@@ -7131,7 +7186,7 @@
                 </a:solidFill>
                 <a:latin typeface="Calibri"/>
               </a:rPr>
-              <a:t>Inlämningen för vecka 42 öppnar du från veckosidan. Sista dag: söndag 18 oktober.</a:t>
+              <a:t>Läsförståelsen senast torsdag 15 oktober, inlämningen senast söndag 18 oktober. Båda öppnar du från veckosidan.</a:t>
             </a:r>
           </a:p>
         </p:txBody>

--- a/sjoskolan/vecka-42/aktuell/v42_02_Regler_ansvar_och_arbetsmetoder_elev.pptx
+++ b/sjoskolan/vecka-42/aktuell/v42_02_Regler_ansvar_och_arbetsmetoder_elev.pptx
@@ -7186,7 +7186,7 @@
                 </a:solidFill>
                 <a:latin typeface="Calibri"/>
               </a:rPr>
-              <a:t>Läsförståelsen senast torsdag 15 oktober, inlämningen senast söndag 18 oktober. Båda öppnar du från veckosidan.</a:t>
+              <a:t>Quizet senast torsdag 15 oktober, inlämningen senast söndag 18 oktober. Båda öppnar du från veckosidan.</a:t>
             </a:r>
           </a:p>
         </p:txBody>

--- a/sjoskolan/vecka-42/aktuell/v42_02_Regler_ansvar_och_arbetsmetoder_elev.pptx
+++ b/sjoskolan/vecka-42/aktuell/v42_02_Regler_ansvar_och_arbetsmetoder_elev.pptx
@@ -6568,7 +6568,7 @@
                 </a:solidFill>
                 <a:latin typeface="Calibri"/>
               </a:rPr>
-              <a:t>Komplettera riskbedömningen med ansvar, vald arbetsmetod och motiverad regelhänvisning. Inlämning senast 18 oktober.</a:t>
+              <a:t>Komplettera riskbedömningen med ansvar, vald arbetsmetod och motiverad regelhänvisning. Inlämningen senast fredag 16 oktober.</a:t>
             </a:r>
           </a:p>
         </p:txBody>
@@ -7186,7 +7186,7 @@
                 </a:solidFill>
                 <a:latin typeface="Calibri"/>
               </a:rPr>
-              <a:t>Quizet senast torsdag 15 oktober, inlämningen senast söndag 18 oktober. Båda öppnar du från veckosidan.</a:t>
+              <a:t>Läs texterna och gör quizet senast torsdag 15 oktober. Inlämningen senast fredag 16 oktober. Allt finns på veckosidan.</a:t>
             </a:r>
           </a:p>
         </p:txBody>
